--- a/assets/templates/certificate_APIDS_blank.pptx
+++ b/assets/templates/certificate_APIDS_blank.pptx
@@ -127,19 +127,19 @@
 <pc:chgInfo xmlns:a="http://schemas.openxmlformats.org/drawingml/2006/main" xmlns:r="http://schemas.openxmlformats.org/officeDocument/2006/relationships" xmlns:ac="http://schemas.microsoft.com/office/drawing/2013/main/command" xmlns:pc="http://schemas.microsoft.com/office/powerpoint/2013/main/command">
   <pc:docChgLst>
     <pc:chgData name="Md Sajid" userId="845527902de0ee58" providerId="LiveId" clId="{61A40EE9-209D-4564-AD85-379D6604182C}"/>
-    <pc:docChg chg="modSld">
-      <pc:chgData name="Md Sajid" userId="845527902de0ee58" providerId="LiveId" clId="{61A40EE9-209D-4564-AD85-379D6604182C}" dt="2026-08-21T10:12:45.806" v="40" actId="20577"/>
+    <pc:docChg chg="undo custSel modSld">
+      <pc:chgData name="Md Sajid" userId="845527902de0ee58" providerId="LiveId" clId="{61A40EE9-209D-4564-AD85-379D6604182C}" dt="2026-09-11T09:42:38.765" v="543" actId="20577"/>
       <pc:docMkLst>
         <pc:docMk/>
       </pc:docMkLst>
       <pc:sldChg chg="modSp mod">
-        <pc:chgData name="Md Sajid" userId="845527902de0ee58" providerId="LiveId" clId="{61A40EE9-209D-4564-AD85-379D6604182C}" dt="2026-08-21T10:12:45.806" v="40" actId="20577"/>
+        <pc:chgData name="Md Sajid" userId="845527902de0ee58" providerId="LiveId" clId="{61A40EE9-209D-4564-AD85-379D6604182C}" dt="2026-09-11T09:42:38.765" v="543" actId="20577"/>
         <pc:sldMkLst>
           <pc:docMk/>
           <pc:sldMk cId="0" sldId="256"/>
         </pc:sldMkLst>
         <pc:spChg chg="mod">
-          <ac:chgData name="Md Sajid" userId="845527902de0ee58" providerId="LiveId" clId="{61A40EE9-209D-4564-AD85-379D6604182C}" dt="2026-08-21T10:12:45.806" v="40" actId="20577"/>
+          <ac:chgData name="Md Sajid" userId="845527902de0ee58" providerId="LiveId" clId="{61A40EE9-209D-4564-AD85-379D6604182C}" dt="2026-09-11T09:42:38.765" v="543" actId="20577"/>
           <ac:spMkLst>
             <pc:docMk/>
             <pc:sldMk cId="0" sldId="256"/>
@@ -331,7 +331,7 @@
           <a:p>
             <a:fld id="{1744FA4F-7D38-47E7-91B4-5171CDF4458F}" type="datetimeFigureOut">
               <a:rPr lang="en-US" smtClean="0"/>
-              <a:t>8/21/2026</a:t>
+              <a:t>9/11/2026</a:t>
             </a:fld>
             <a:endParaRPr lang="en-US"/>
           </a:p>
@@ -494,7 +494,7 @@
           <a:p>
             <a:fld id="{1744FA4F-7D38-47E7-91B4-5171CDF4458F}" type="datetimeFigureOut">
               <a:rPr lang="en-US" smtClean="0"/>
-              <a:t>8/21/2026</a:t>
+              <a:t>9/11/2026</a:t>
             </a:fld>
             <a:endParaRPr lang="en-US"/>
           </a:p>
@@ -667,7 +667,7 @@
           <a:p>
             <a:fld id="{1744FA4F-7D38-47E7-91B4-5171CDF4458F}" type="datetimeFigureOut">
               <a:rPr lang="en-US" smtClean="0"/>
-              <a:t>8/21/2026</a:t>
+              <a:t>9/11/2026</a:t>
             </a:fld>
             <a:endParaRPr lang="en-US"/>
           </a:p>
@@ -830,7 +830,7 @@
           <a:p>
             <a:fld id="{1744FA4F-7D38-47E7-91B4-5171CDF4458F}" type="datetimeFigureOut">
               <a:rPr lang="en-US" smtClean="0"/>
-              <a:t>8/21/2026</a:t>
+              <a:t>9/11/2026</a:t>
             </a:fld>
             <a:endParaRPr lang="en-US"/>
           </a:p>
@@ -1070,7 +1070,7 @@
           <a:p>
             <a:fld id="{1744FA4F-7D38-47E7-91B4-5171CDF4458F}" type="datetimeFigureOut">
               <a:rPr lang="en-US" smtClean="0"/>
-              <a:t>8/21/2026</a:t>
+              <a:t>9/11/2026</a:t>
             </a:fld>
             <a:endParaRPr lang="en-US"/>
           </a:p>
@@ -1350,7 +1350,7 @@
           <a:p>
             <a:fld id="{1744FA4F-7D38-47E7-91B4-5171CDF4458F}" type="datetimeFigureOut">
               <a:rPr lang="en-US" smtClean="0"/>
-              <a:t>8/21/2026</a:t>
+              <a:t>9/11/2026</a:t>
             </a:fld>
             <a:endParaRPr lang="en-US"/>
           </a:p>
@@ -1764,7 +1764,7 @@
           <a:p>
             <a:fld id="{1744FA4F-7D38-47E7-91B4-5171CDF4458F}" type="datetimeFigureOut">
               <a:rPr lang="en-US" smtClean="0"/>
-              <a:t>8/21/2026</a:t>
+              <a:t>9/11/2026</a:t>
             </a:fld>
             <a:endParaRPr lang="en-US"/>
           </a:p>
@@ -1876,7 +1876,7 @@
           <a:p>
             <a:fld id="{1744FA4F-7D38-47E7-91B4-5171CDF4458F}" type="datetimeFigureOut">
               <a:rPr lang="en-US" smtClean="0"/>
-              <a:t>8/21/2026</a:t>
+              <a:t>9/11/2026</a:t>
             </a:fld>
             <a:endParaRPr lang="en-US"/>
           </a:p>
@@ -1966,7 +1966,7 @@
           <a:p>
             <a:fld id="{1744FA4F-7D38-47E7-91B4-5171CDF4458F}" type="datetimeFigureOut">
               <a:rPr lang="en-US" smtClean="0"/>
-              <a:t>8/21/2026</a:t>
+              <a:t>9/11/2026</a:t>
             </a:fld>
             <a:endParaRPr lang="en-US"/>
           </a:p>
@@ -2236,7 +2236,7 @@
           <a:p>
             <a:fld id="{1744FA4F-7D38-47E7-91B4-5171CDF4458F}" type="datetimeFigureOut">
               <a:rPr lang="en-US" smtClean="0"/>
-              <a:t>8/21/2026</a:t>
+              <a:t>9/11/2026</a:t>
             </a:fld>
             <a:endParaRPr lang="en-US"/>
           </a:p>
@@ -2483,7 +2483,7 @@
           <a:p>
             <a:fld id="{1744FA4F-7D38-47E7-91B4-5171CDF4458F}" type="datetimeFigureOut">
               <a:rPr lang="en-US" smtClean="0"/>
-              <a:t>8/21/2026</a:t>
+              <a:t>9/11/2026</a:t>
             </a:fld>
             <a:endParaRPr lang="en-US"/>
           </a:p>
@@ -2689,7 +2689,7 @@
           <a:p>
             <a:fld id="{1744FA4F-7D38-47E7-91B4-5171CDF4458F}" type="datetimeFigureOut">
               <a:rPr lang="en-US" smtClean="0"/>
-              <a:t>8/21/2026</a:t>
+              <a:t>9/11/2026</a:t>
             </a:fld>
             <a:endParaRPr lang="en-US"/>
           </a:p>
@@ -3092,7 +3092,7 @@
         <p:spPr>
           <a:xfrm>
             <a:off x="214282" y="2643182"/>
-            <a:ext cx="8929718" cy="1723549"/>
+            <a:ext cx="8929718" cy="2062103"/>
           </a:xfrm>
           <a:prstGeom prst="rect">
             <a:avLst/>
@@ -3108,7 +3108,11 @@
             <a:pPr algn="ctr"/>
             <a:r>
               <a:rPr lang="en-US" sz="1400" dirty="0"/>
-              <a:t>This is to certify that </a:t>
+              <a:t>This is to certify </a:t>
+            </a:r>
+            <a:r>
+              <a:rPr lang="en-US" sz="1400"/>
+              <a:t>that </a:t>
             </a:r>
             <a:r>
               <a:rPr lang="en-US" sz="2000" b="1">
@@ -3116,49 +3120,45 @@
                   <a:sysClr val="windowText" lastClr="000000"/>
                 </a:solidFill>
               </a:rPr>
-              <a:t>[ </a:t>
-            </a:r>
-            <a:r>
-              <a:rPr lang="en-US" sz="2000" b="1">
+              <a:t>[</a:t>
+            </a:r>
+            <a:r>
+              <a:rPr lang="en-US" sz="2400" b="1">
                 <a:solidFill>
                   <a:sysClr val="windowText" lastClr="000000"/>
                 </a:solidFill>
-                <a:latin typeface="Brush Script MT"/>
+                <a:latin typeface="Brush Script MT" panose="03060802040406070304" pitchFamily="66" charset="0"/>
               </a:rPr>
-              <a:t>                    </a:t>
-            </a:r>
-            <a:r>
-              <a:rPr lang="en-US" sz="2000" b="1" dirty="0">
+              <a:t>                     </a:t>
+            </a:r>
+            <a:r>
+              <a:rPr lang="en-US" sz="2800" b="1">
+                <a:solidFill>
+                  <a:sysClr val="windowText" lastClr="000000"/>
+                </a:solidFill>
+                <a:latin typeface="Brush Script MT" panose="03060802040406070304" pitchFamily="66" charset="0"/>
+              </a:rPr>
+              <a:t> </a:t>
+            </a:r>
+            <a:r>
+              <a:rPr lang="en-IN" sz="2000" b="1" dirty="0">
                 <a:solidFill>
                   <a:sysClr val="windowText" lastClr="000000"/>
                 </a:solidFill>
               </a:rPr>
-              <a:t>]</a:t>
-            </a:r>
-            <a:r>
-              <a:rPr lang="en-US" sz="2000" b="1" dirty="0">
-                <a:solidFill>
-                  <a:sysClr val="windowText" lastClr="000000"/>
-                </a:solidFill>
-                <a:latin typeface="Brush Script MT"/>
-              </a:rPr>
-              <a:t> </a:t>
+              <a:t>] </a:t>
+            </a:r>
+            <a:r>
+              <a:rPr lang="en-IN" sz="1400" b="1" dirty="0"/>
+              <a:t>has successfully completed 6 months Advanced Program in Industrial Data Science (APIDS) </a:t>
             </a:r>
             <a:r>
               <a:rPr lang="en-IN" sz="1400" dirty="0"/>
-              <a:t>has successfully completed 6 </a:t>
+              <a:t>. This course covered fundamental and advanced topics </a:t>
             </a:r>
             <a:r>
               <a:rPr lang="en-IN" sz="1400" b="1" dirty="0"/>
-              <a:t>months Advanced Program in Industrial Data Science (APIDS) </a:t>
-            </a:r>
-            <a:r>
-              <a:rPr lang="en-IN" sz="1400" dirty="0"/>
-              <a:t>. This course covered fundamental and advanced topics</a:t>
-            </a:r>
-            <a:r>
-              <a:rPr lang="en-IN" sz="1400" b="1" dirty="0"/>
-              <a:t> in Data Science, including DBMS Programming, Data Analysis &amp; Visualization, and Data Mining  </a:t>
+              <a:t>in Data Science, including DBMS Programming, Data Analysis &amp; Visualization, and Data Mining (Predictive Modeling, Machine Learning, Deep Learning, and Generative AI) </a:t>
             </a:r>
             <a:r>
               <a:rPr lang="en-IN" sz="1400" dirty="0"/>
@@ -3169,11 +3169,11 @@
             </a:br>
             <a:r>
               <a:rPr lang="en-IN" sz="1400" dirty="0"/>
-              <a:t> Applications</a:t>
+              <a:t> Applications: </a:t>
             </a:r>
             <a:r>
               <a:rPr lang="en-IN" sz="1400" b="1" dirty="0"/>
-              <a:t>: Excel, SQL, Python, SAS, Tableau, Power BI</a:t>
+              <a:t>Excel, SQL, Python, SAS, Tableau, Power BI, Python ML &amp; Gen AI, Azure MLOPS </a:t>
             </a:r>
             <a:br>
               <a:rPr lang="en-IN" sz="1400" dirty="0"/>
@@ -3195,7 +3195,7 @@
             <a:pPr algn="ctr"/>
             <a:r>
               <a:rPr lang="en-US" sz="1600" b="1" dirty="0"/>
-              <a:t>Certificate Registration Number: [  202505DVA2057  ]     Date of Completion: [  08-04-2026 ]</a:t>
+              <a:t>Certificate Registration Number: [202505DVA2073 ]     Date of Completion: [  07-09-2026 ]</a:t>
             </a:r>
           </a:p>
         </p:txBody>
